--- a/Sleep-Alert-Car-Camera-Image-Classification-System.pptx
+++ b/Sleep-Alert-Car-Camera-Image-Classification-System.pptx
@@ -2242,7 +2242,31 @@
                 <a:ea typeface="Calibri" pitchFamily="34" charset="-122"/>
                 <a:cs typeface="Calibri" pitchFamily="34" charset="-120"/>
               </a:rPr>
-              <a:t>LABBAALLI Hamza  ·  MAAROUF Yassine  ·  ID-BOUBRIK Abdelouahed  ·  IDDAHA Soumaya</a:t>
+              <a:t>Prof : JAAFAR Idrais</a:t>
+            </a:r>
+            <a:endParaRPr lang="en-US" sz="1100" dirty="0">
+              <a:solidFill>
+                <a:srgbClr val="111111"/>
+              </a:solidFill>
+              <a:latin typeface="Roboto" panose="02000000000000000000" pitchFamily="2" charset="0"/>
+              <a:ea typeface="Calibri" pitchFamily="34" charset="-122"/>
+              <a:cs typeface="Calibri" pitchFamily="34" charset="-120"/>
+            </a:endParaRPr>
+          </a:p>
+          <a:p>
+            <a:pPr marL="0" indent="0">
+              <a:buNone/>
+            </a:pPr>
+            <a:r>
+              <a:rPr lang="en-US" sz="1100" dirty="0">
+                <a:solidFill>
+                  <a:srgbClr val="94A3B8"/>
+                </a:solidFill>
+                <a:latin typeface="Calibri" pitchFamily="34" charset="0"/>
+                <a:ea typeface="Calibri" pitchFamily="34" charset="-122"/>
+                <a:cs typeface="Calibri" pitchFamily="34" charset="-120"/>
+              </a:rPr>
+              <a:t>Contributors : LABBAALLI Hamza  |  MAAROUF Yassine  |  ID-BOUBRIK Abdelouahed  |  IDDAHA Soumaya</a:t>
             </a:r>
             <a:endParaRPr lang="en-US" sz="1100" dirty="0"/>
           </a:p>
@@ -2432,7 +2456,7 @@
                 <a:ea typeface="Calibri" pitchFamily="34" charset="-122"/>
                 <a:cs typeface="Calibri" pitchFamily="34" charset="-120"/>
               </a:rPr>
-              <a:t>Local Setup · Hardware Requirements · Edge Compatibility</a:t>
+              <a:t>Local Setup - Hardware Requirements - Edge Compatibility</a:t>
             </a:r>
             <a:endParaRPr lang="en-US" sz="1200" dirty="0"/>
           </a:p>
@@ -4124,72 +4148,6 @@
           </a:p>
         </p:txBody>
       </p:sp>
-      <p:sp>
-        <p:nvSpPr>
-          <p:cNvPr id="35" name="Shape 32"/>
-          <p:cNvSpPr/>
-          <p:nvPr/>
-        </p:nvSpPr>
-        <p:spPr>
-          <a:xfrm>
-            <a:off x="548640" y="4572000"/>
-            <a:ext cx="8046720" cy="320040"/>
-          </a:xfrm>
-          <a:prstGeom prst="rect">
-            <a:avLst/>
-          </a:prstGeom>
-          <a:solidFill>
-            <a:srgbClr val="0891B2">
-              <a:alpha val="15000"/>
-            </a:srgbClr>
-          </a:solidFill>
-          <a:ln w="6350">
-            <a:solidFill>
-              <a:srgbClr val="0891B2"/>
-            </a:solidFill>
-            <a:prstDash val="solid"/>
-          </a:ln>
-        </p:spPr>
-      </p:sp>
-      <p:sp>
-        <p:nvSpPr>
-          <p:cNvPr id="36" name="Text 33"/>
-          <p:cNvSpPr/>
-          <p:nvPr/>
-        </p:nvSpPr>
-        <p:spPr>
-          <a:xfrm>
-            <a:off x="731520" y="4590288"/>
-            <a:ext cx="7680960" cy="274320"/>
-          </a:xfrm>
-          <a:prstGeom prst="rect">
-            <a:avLst/>
-          </a:prstGeom>
-          <a:noFill/>
-          <a:ln/>
-        </p:spPr>
-        <p:txBody>
-          <a:bodyPr wrap="square" lIns="0" tIns="0" rIns="0" bIns="0" rtlCol="0" anchor="ctr"/>
-          <a:lstStyle/>
-          <a:p>
-            <a:pPr marL="0" indent="0">
-              <a:buNone/>
-            </a:pPr>
-            <a:r>
-              <a:rPr lang="en-US" sz="900" dirty="0">
-                <a:solidFill>
-                  <a:srgbClr val="22D3EE"/>
-                </a:solidFill>
-                <a:latin typeface="Calibri" pitchFamily="34" charset="0"/>
-                <a:ea typeface="Calibri" pitchFamily="34" charset="-122"/>
-                <a:cs typeface="Calibri" pitchFamily="34" charset="-120"/>
-              </a:rPr>
-              <a:t>No Cloud Dependency — All processing happens locally, ensuring privacy, low latency, and offline operation.</a:t>
-            </a:r>
-            <a:endParaRPr lang="en-US" sz="900" dirty="0"/>
-          </a:p>
-        </p:txBody>
-      </p:sp>
     </p:spTree>
   </p:cSld>
   <p:clrMapOvr>
@@ -5391,7 +5349,7 @@
                 <a:ea typeface="Calibri" pitchFamily="34" charset="-122"/>
                 <a:cs typeface="Calibri" pitchFamily="34" charset="-120"/>
               </a:rPr>
-              <a:t>Sleep Alert System — Real-Time Driver Safety Through Edge AI</a:t>
+              <a:t>Sleep Alert System - Real-Time Driver Safety Through Edge AI</a:t>
             </a:r>
             <a:endParaRPr lang="en-US" sz="1200" dirty="0"/>
           </a:p>
@@ -6273,7 +6231,7 @@
                 <a:ea typeface="Calibri" pitchFamily="34" charset="-122"/>
                 <a:cs typeface="Calibri" pitchFamily="34" charset="-120"/>
               </a:rPr>
-              <a:t>LABBAALLI Hamza  ·  MAAROUF Yassine  ·  ID-BOUBRIK Abdelouahed  ·  IDDAHA Soumaya</a:t>
+              <a:t>LABBAALLI Hamza  |  MAAROUF Yassine  |  ID-BOUBRIK Abdelouahed  |  IDDAHA Soumaya</a:t>
             </a:r>
             <a:endParaRPr lang="en-US" sz="1200" dirty="0"/>
           </a:p>
@@ -6463,7 +6421,7 @@
                 <a:ea typeface="Calibri" pitchFamily="34" charset="-122"/>
                 <a:cs typeface="Calibri" pitchFamily="34" charset="-120"/>
               </a:rPr>
-              <a:t>Problem Statement — Why This Matters</a:t>
+              <a:t>Problem Statement - Why This Matters</a:t>
             </a:r>
             <a:endParaRPr lang="en-US" sz="1200" dirty="0"/>
           </a:p>
@@ -7211,7 +7169,7 @@
                 <a:ea typeface="Calibri" pitchFamily="34" charset="-122"/>
                 <a:cs typeface="Calibri" pitchFamily="34" charset="-120"/>
               </a:rPr>
-              <a:t>Real-time monitoring systems that can detect early signs of drowsiness and alert drivers before accidents occur — affordable, non-intrusive, and edge-deployable.</a:t>
+              <a:t>Real-time monitoring systems that can detect early signs of drowsiness and alert drivers before accidents occur affordable, non-intrusive, and edge-deployable.</a:t>
             </a:r>
             <a:endParaRPr lang="en-US" sz="1000" dirty="0"/>
           </a:p>
@@ -7362,7 +7320,7 @@
                 <a:ea typeface="Calibri" pitchFamily="34" charset="-122"/>
                 <a:cs typeface="Calibri" pitchFamily="34" charset="-120"/>
               </a:rPr>
-              <a:t>Edge-Based AI Monitoring System — Sleep Alert</a:t>
+              <a:t>Edge-Based AI Monitoring System - Sleep Alert</a:t>
             </a:r>
             <a:endParaRPr lang="en-US" sz="1200" dirty="0"/>
           </a:p>
@@ -8713,7 +8671,7 @@
                 <a:ea typeface="Calibri" pitchFamily="34" charset="-122"/>
                 <a:cs typeface="Calibri" pitchFamily="34" charset="-120"/>
               </a:rPr>
-              <a:t>Technical Design &amp; Data Flow — Pro-Vision v2.0</a:t>
+              <a:t>Technical Design &amp; Data Flow - Pro-Vision v2.0</a:t>
             </a:r>
             <a:endParaRPr lang="en-US" sz="1200" dirty="0"/>
           </a:p>
@@ -9994,7 +9952,7 @@
                 <a:ea typeface="Calibri" pitchFamily="34" charset="-122"/>
                 <a:cs typeface="Calibri" pitchFamily="34" charset="-120"/>
               </a:rPr>
-              <a:t>Detection Engine · Classification Logic · Scoring Algorithm</a:t>
+              <a:t>Detection Engine - Classification Logic - Scoring Algorithm</a:t>
             </a:r>
             <a:endParaRPr lang="en-US" sz="1200" dirty="0"/>
           </a:p>
@@ -10878,7 +10836,7 @@
                 <a:ea typeface="Calibri" pitchFamily="34" charset="-122"/>
                 <a:cs typeface="Calibri" pitchFamily="34" charset="-120"/>
               </a:rPr>
-              <a:t>Detection Criteria · System Response · Confidence Levels</a:t>
+              <a:t>Detection Criteria - System Response - Confidence Levels</a:t>
             </a:r>
             <a:endParaRPr lang="en-US" sz="1200" dirty="0"/>
           </a:p>
@@ -13715,7 +13673,7 @@
                 <a:ea typeface="Calibri" pitchFamily="34" charset="-122"/>
                 <a:cs typeface="Calibri" pitchFamily="34" charset="-120"/>
               </a:rPr>
-              <a:t>Streamlit Dashboard Interface · Benchmarks · Test Results</a:t>
+              <a:t>Streamlit Dashboard Interface - Benchmarks - Test Results</a:t>
             </a:r>
             <a:endParaRPr lang="en-US" sz="1200" dirty="0"/>
           </a:p>

--- a/Sleep-Alert-Car-Camera-Image-Classification-System.pptx
+++ b/Sleep-Alert-Car-Camera-Image-Classification-System.pptx
@@ -2242,7 +2242,18 @@
                 <a:ea typeface="Calibri" pitchFamily="34" charset="-122"/>
                 <a:cs typeface="Calibri" pitchFamily="34" charset="-120"/>
               </a:rPr>
-              <a:t>Prof : JAAFAR Idrais</a:t>
+              <a:t>PROFESSORS : OUKDACH Yassine | </a:t>
+            </a:r>
+            <a:r>
+              <a:rPr lang="en-US" sz="1100">
+                <a:solidFill>
+                  <a:srgbClr val="94A3B8"/>
+                </a:solidFill>
+                <a:latin typeface="Calibri" pitchFamily="34" charset="0"/>
+                <a:ea typeface="Calibri" pitchFamily="34" charset="-122"/>
+                <a:cs typeface="Calibri" pitchFamily="34" charset="-120"/>
+              </a:rPr>
+              <a:t>IDRAIS Jaafar</a:t>
             </a:r>
             <a:endParaRPr lang="en-US" sz="1100" dirty="0">
               <a:solidFill>
@@ -2266,7 +2277,7 @@
                 <a:ea typeface="Calibri" pitchFamily="34" charset="-122"/>
                 <a:cs typeface="Calibri" pitchFamily="34" charset="-120"/>
               </a:rPr>
-              <a:t>Contributors : LABBAALLI Hamza  |  MAAROUF Yassine  |  ID-BOUBRIK Abdelouahed  |  IDDAHA Soumaya</a:t>
+              <a:t>CONTRIBUTORS : LABBAALLI Hamza  |  MAAROUF Yassine  |  ID-BOUBRIK Abdelouahed  |  IDDAHA Soumaya</a:t>
             </a:r>
             <a:endParaRPr lang="en-US" sz="1100" dirty="0"/>
           </a:p>
